--- a/Website_Idea_1.pptx
+++ b/Website_Idea_1.pptx
@@ -130,7 +130,7 @@
           <p:cNvPr id="2" name="Title 1">
             <a:extLst>
               <a:ext uri="{FF2B5EF4-FFF2-40B4-BE49-F238E27FC236}">
-                <a16:creationId xmlns:a16="http://schemas.microsoft.com/office/drawing/2014/main" id="{B523EB0F-23F4-9416-406E-93B0683499AF}"/>
+                <a16:creationId xmlns:a16="http://schemas.microsoft.com/office/drawing/2014/main" id="{83269204-366F-F80D-6DCA-DED52D7E4123}"/>
               </a:ext>
             </a:extLst>
           </p:cNvPr>
@@ -159,7 +159,7 @@
           <p:cNvPr id="3" name="Date Placeholder 2">
             <a:extLst>
               <a:ext uri="{FF2B5EF4-FFF2-40B4-BE49-F238E27FC236}">
-                <a16:creationId xmlns:a16="http://schemas.microsoft.com/office/drawing/2014/main" id="{100655DB-1E42-D397-C3A7-A9C302AFDEAE}"/>
+                <a16:creationId xmlns:a16="http://schemas.microsoft.com/office/drawing/2014/main" id="{6DFC6AE1-D646-516E-BBA8-10736A0F9DED}"/>
               </a:ext>
             </a:extLst>
           </p:cNvPr>
@@ -175,7 +175,7 @@
           <a:bodyPr/>
           <a:lstStyle/>
           <a:p>
-            <a:fld id="{9191C8EE-7FFF-456A-A908-4ED3C6B3B1D6}" type="datetimeFigureOut">
+            <a:fld id="{C9A6AD13-792E-408D-8EDF-06EA8ADC8918}" type="datetimeFigureOut">
               <a:rPr lang="LID4096" smtClean="0"/>
               <a:t>08/26/2025</a:t>
             </a:fld>
@@ -188,7 +188,7 @@
           <p:cNvPr id="4" name="Footer Placeholder 3">
             <a:extLst>
               <a:ext uri="{FF2B5EF4-FFF2-40B4-BE49-F238E27FC236}">
-                <a16:creationId xmlns:a16="http://schemas.microsoft.com/office/drawing/2014/main" id="{B19ABB38-D338-4CDD-3584-D8CBC6418336}"/>
+                <a16:creationId xmlns:a16="http://schemas.microsoft.com/office/drawing/2014/main" id="{02E489C2-CB44-8A26-A2BE-B5DD20DD9B79}"/>
               </a:ext>
             </a:extLst>
           </p:cNvPr>
@@ -213,7 +213,7 @@
           <p:cNvPr id="5" name="Slide Number Placeholder 4">
             <a:extLst>
               <a:ext uri="{FF2B5EF4-FFF2-40B4-BE49-F238E27FC236}">
-                <a16:creationId xmlns:a16="http://schemas.microsoft.com/office/drawing/2014/main" id="{447A4176-BA72-9639-E310-2F9118037329}"/>
+                <a16:creationId xmlns:a16="http://schemas.microsoft.com/office/drawing/2014/main" id="{6EC8CABC-6675-77D3-34DF-787FD530C16F}"/>
               </a:ext>
             </a:extLst>
           </p:cNvPr>
@@ -229,7 +229,7 @@
           <a:bodyPr/>
           <a:lstStyle/>
           <a:p>
-            <a:fld id="{8C2FC140-0072-4F1D-B5F8-CB400F714D6A}" type="slidenum">
+            <a:fld id="{4409DFFF-AB73-4566-88A5-7680AB07AD3A}" type="slidenum">
               <a:rPr lang="LID4096" smtClean="0"/>
               <a:t>‹#›</a:t>
             </a:fld>
@@ -240,7 +240,7 @@
     </p:spTree>
     <p:extLst>
       <p:ext uri="{BB962C8B-B14F-4D97-AF65-F5344CB8AC3E}">
-        <p14:creationId xmlns:p14="http://schemas.microsoft.com/office/powerpoint/2010/main" val="3951528749"/>
+        <p14:creationId xmlns:p14="http://schemas.microsoft.com/office/powerpoint/2010/main" val="3899799802"/>
       </p:ext>
     </p:extLst>
   </p:cSld>
@@ -277,7 +277,7 @@
           <p:cNvPr id="2" name="Title Placeholder 1">
             <a:extLst>
               <a:ext uri="{FF2B5EF4-FFF2-40B4-BE49-F238E27FC236}">
-                <a16:creationId xmlns:a16="http://schemas.microsoft.com/office/drawing/2014/main" id="{EB0536A6-C972-6AAA-606A-A5631636BB8D}"/>
+                <a16:creationId xmlns:a16="http://schemas.microsoft.com/office/drawing/2014/main" id="{F28E8957-706A-35AF-00C2-4F68D1B08753}"/>
               </a:ext>
             </a:extLst>
           </p:cNvPr>
@@ -316,7 +316,7 @@
           <p:cNvPr id="3" name="Text Placeholder 2">
             <a:extLst>
               <a:ext uri="{FF2B5EF4-FFF2-40B4-BE49-F238E27FC236}">
-                <a16:creationId xmlns:a16="http://schemas.microsoft.com/office/drawing/2014/main" id="{047F0BF7-DE66-B45A-943C-FCA2EA484457}"/>
+                <a16:creationId xmlns:a16="http://schemas.microsoft.com/office/drawing/2014/main" id="{8FA7EECF-A778-A321-5974-1A7A597AE011}"/>
               </a:ext>
             </a:extLst>
           </p:cNvPr>
@@ -384,7 +384,7 @@
           <p:cNvPr id="4" name="Date Placeholder 3">
             <a:extLst>
               <a:ext uri="{FF2B5EF4-FFF2-40B4-BE49-F238E27FC236}">
-                <a16:creationId xmlns:a16="http://schemas.microsoft.com/office/drawing/2014/main" id="{A256EFCD-87EA-88C4-8224-4AA5DFDBEAB5}"/>
+                <a16:creationId xmlns:a16="http://schemas.microsoft.com/office/drawing/2014/main" id="{51626563-02B2-1D32-B10C-83F0EA2580F2}"/>
               </a:ext>
             </a:extLst>
           </p:cNvPr>
@@ -418,7 +418,7 @@
             </a:lvl1pPr>
           </a:lstStyle>
           <a:p>
-            <a:fld id="{9191C8EE-7FFF-456A-A908-4ED3C6B3B1D6}" type="datetimeFigureOut">
+            <a:fld id="{C9A6AD13-792E-408D-8EDF-06EA8ADC8918}" type="datetimeFigureOut">
               <a:rPr lang="LID4096" smtClean="0"/>
               <a:t>08/26/2025</a:t>
             </a:fld>
@@ -431,7 +431,7 @@
           <p:cNvPr id="5" name="Footer Placeholder 4">
             <a:extLst>
               <a:ext uri="{FF2B5EF4-FFF2-40B4-BE49-F238E27FC236}">
-                <a16:creationId xmlns:a16="http://schemas.microsoft.com/office/drawing/2014/main" id="{58689060-18D4-65FD-E6C0-1D662D28D9AC}"/>
+                <a16:creationId xmlns:a16="http://schemas.microsoft.com/office/drawing/2014/main" id="{261F516A-8659-1A9F-95AF-DD7E277EE9C1}"/>
               </a:ext>
             </a:extLst>
           </p:cNvPr>
@@ -474,7 +474,7 @@
           <p:cNvPr id="6" name="Slide Number Placeholder 5">
             <a:extLst>
               <a:ext uri="{FF2B5EF4-FFF2-40B4-BE49-F238E27FC236}">
-                <a16:creationId xmlns:a16="http://schemas.microsoft.com/office/drawing/2014/main" id="{8A615A5E-A617-7898-0615-DB9CFCD7144F}"/>
+                <a16:creationId xmlns:a16="http://schemas.microsoft.com/office/drawing/2014/main" id="{A82A687D-3D04-157D-1383-1E7EAAC16084}"/>
               </a:ext>
             </a:extLst>
           </p:cNvPr>
@@ -508,7 +508,7 @@
             </a:lvl1pPr>
           </a:lstStyle>
           <a:p>
-            <a:fld id="{8C2FC140-0072-4F1D-B5F8-CB400F714D6A}" type="slidenum">
+            <a:fld id="{4409DFFF-AB73-4566-88A5-7680AB07AD3A}" type="slidenum">
               <a:rPr lang="LID4096" smtClean="0"/>
               <a:t>‹#›</a:t>
             </a:fld>
@@ -519,7 +519,7 @@
     </p:spTree>
     <p:extLst>
       <p:ext uri="{BB962C8B-B14F-4D97-AF65-F5344CB8AC3E}">
-        <p14:creationId xmlns:p14="http://schemas.microsoft.com/office/powerpoint/2010/main" val="2333073462"/>
+        <p14:creationId xmlns:p14="http://schemas.microsoft.com/office/powerpoint/2010/main" val="1443239717"/>
       </p:ext>
     </p:extLst>
   </p:cSld>
@@ -838,7 +838,7 @@
           <p:cNvPr id="2" name="Title 1" hidden="1">
             <a:extLst>
               <a:ext uri="{FF2B5EF4-FFF2-40B4-BE49-F238E27FC236}">
-                <a16:creationId xmlns:a16="http://schemas.microsoft.com/office/drawing/2014/main" id="{936F351C-677C-D9F7-A90A-4A2A3FE02CDE}"/>
+                <a16:creationId xmlns:a16="http://schemas.microsoft.com/office/drawing/2014/main" id="{70C27BFD-B6C7-2856-25ED-299D85DFB585}"/>
               </a:ext>
             </a:extLst>
           </p:cNvPr>
@@ -863,7 +863,7 @@
           <p:cNvPr id="3" name="Picture 2">
             <a:extLst>
               <a:ext uri="{FF2B5EF4-FFF2-40B4-BE49-F238E27FC236}">
-                <a16:creationId xmlns:a16="http://schemas.microsoft.com/office/drawing/2014/main" id="{907D2CDF-8C56-1B92-319B-D43587DEF6AC}"/>
+                <a16:creationId xmlns:a16="http://schemas.microsoft.com/office/drawing/2014/main" id="{776FDF84-379C-85C5-3C87-EB4ABD340F75}"/>
               </a:ext>
             </a:extLst>
           </p:cNvPr>
@@ -889,7 +889,7 @@
     </p:spTree>
     <p:extLst>
       <p:ext uri="{BB962C8B-B14F-4D97-AF65-F5344CB8AC3E}">
-        <p14:creationId xmlns:p14="http://schemas.microsoft.com/office/powerpoint/2010/main" val="3839179642"/>
+        <p14:creationId xmlns:p14="http://schemas.microsoft.com/office/powerpoint/2010/main" val="4194292492"/>
       </p:ext>
     </p:extLst>
   </p:cSld>
@@ -927,7 +927,7 @@
           <p:cNvPr id="2" name="Title 1" hidden="1">
             <a:extLst>
               <a:ext uri="{FF2B5EF4-FFF2-40B4-BE49-F238E27FC236}">
-                <a16:creationId xmlns:a16="http://schemas.microsoft.com/office/drawing/2014/main" id="{6654266C-EB7C-2242-777D-FD84A0F2A4A8}"/>
+                <a16:creationId xmlns:a16="http://schemas.microsoft.com/office/drawing/2014/main" id="{35F57F9E-44B5-6147-CA78-3355ADEA5461}"/>
               </a:ext>
             </a:extLst>
           </p:cNvPr>
@@ -952,7 +952,7 @@
           <p:cNvPr id="3" name="Picture 2">
             <a:extLst>
               <a:ext uri="{FF2B5EF4-FFF2-40B4-BE49-F238E27FC236}">
-                <a16:creationId xmlns:a16="http://schemas.microsoft.com/office/drawing/2014/main" id="{25C25B0D-7EE3-CBC7-FF4A-AA4988BD0F5D}"/>
+                <a16:creationId xmlns:a16="http://schemas.microsoft.com/office/drawing/2014/main" id="{55F33A6C-404E-919C-4E49-E4485D8E7D55}"/>
               </a:ext>
             </a:extLst>
           </p:cNvPr>
@@ -978,7 +978,7 @@
     </p:spTree>
     <p:extLst>
       <p:ext uri="{BB962C8B-B14F-4D97-AF65-F5344CB8AC3E}">
-        <p14:creationId xmlns:p14="http://schemas.microsoft.com/office/powerpoint/2010/main" val="2310605175"/>
+        <p14:creationId xmlns:p14="http://schemas.microsoft.com/office/powerpoint/2010/main" val="2321517800"/>
       </p:ext>
     </p:extLst>
   </p:cSld>
